--- a/Лекции/ИТиП 2 лек 3.pptx
+++ b/Лекции/ИТиП 2 лек 3.pptx
@@ -250,7 +250,7 @@
             <a:fld id="{AA2F9473-F066-431E-A6E8-1D478C995A6B}" type="datetimeFigureOut">
               <a:rPr lang="en-US" smtClean="0"/>
               <a:pPr/>
-              <a:t>2/10/2026</a:t>
+              <a:t>3/6/2026</a:t>
             </a:fld>
             <a:endParaRPr lang="en-US"/>
           </a:p>
@@ -4456,7 +4456,7 @@
           <p:cNvPr id="9" name="Номер слайда 3">
             <a:extLst>
               <a:ext uri="{FF2B5EF4-FFF2-40B4-BE49-F238E27FC236}">
-                <a16:creationId xmlns:a16="http://schemas.microsoft.com/office/drawing/2014/main" xmlns="" id="{3DF48714-7FE4-4364-BF9D-28B9C9E2979D}"/>
+                <a16:creationId xmlns:a16="http://schemas.microsoft.com/office/drawing/2014/main" id="{3DF48714-7FE4-4364-BF9D-28B9C9E2979D}"/>
               </a:ext>
             </a:extLst>
           </p:cNvPr>
@@ -4595,7 +4595,7 @@
           <p:cNvPr id="7" name="Номер слайда 3">
             <a:extLst>
               <a:ext uri="{FF2B5EF4-FFF2-40B4-BE49-F238E27FC236}">
-                <a16:creationId xmlns:a16="http://schemas.microsoft.com/office/drawing/2014/main" xmlns="" id="{3DF48714-7FE4-4364-BF9D-28B9C9E2979D}"/>
+                <a16:creationId xmlns:a16="http://schemas.microsoft.com/office/drawing/2014/main" id="{3DF48714-7FE4-4364-BF9D-28B9C9E2979D}"/>
               </a:ext>
             </a:extLst>
           </p:cNvPr>
@@ -4877,7 +4877,7 @@
           <p:cNvPr id="9" name="Номер слайда 3">
             <a:extLst>
               <a:ext uri="{FF2B5EF4-FFF2-40B4-BE49-F238E27FC236}">
-                <a16:creationId xmlns:a16="http://schemas.microsoft.com/office/drawing/2014/main" xmlns="" id="{3DF48714-7FE4-4364-BF9D-28B9C9E2979D}"/>
+                <a16:creationId xmlns:a16="http://schemas.microsoft.com/office/drawing/2014/main" id="{3DF48714-7FE4-4364-BF9D-28B9C9E2979D}"/>
               </a:ext>
             </a:extLst>
           </p:cNvPr>
@@ -5335,7 +5335,7 @@
           <p:cNvPr id="17" name="Заголовок 16">
             <a:extLst>
               <a:ext uri="{FF2B5EF4-FFF2-40B4-BE49-F238E27FC236}">
-                <a16:creationId xmlns:a16="http://schemas.microsoft.com/office/drawing/2014/main" xmlns="" id="{D630362D-1F09-46B4-9DE4-AEA483AC82FD}"/>
+                <a16:creationId xmlns:a16="http://schemas.microsoft.com/office/drawing/2014/main" id="{D630362D-1F09-46B4-9DE4-AEA483AC82FD}"/>
               </a:ext>
             </a:extLst>
           </p:cNvPr>
@@ -5586,7 +5586,7 @@
           <p:cNvPr id="12" name="TextBox 11">
             <a:extLst>
               <a:ext uri="{FF2B5EF4-FFF2-40B4-BE49-F238E27FC236}">
-                <a16:creationId xmlns:a16="http://schemas.microsoft.com/office/drawing/2014/main" xmlns="" id="{F7B00361-5492-4290-B470-295172C16526}"/>
+                <a16:creationId xmlns:a16="http://schemas.microsoft.com/office/drawing/2014/main" id="{F7B00361-5492-4290-B470-295172C16526}"/>
               </a:ext>
             </a:extLst>
           </p:cNvPr>
@@ -6189,11 +6189,20 @@
             <a:r>
               <a:rPr lang="en-US" sz="2400" dirty="0" err="1">
                 <a:solidFill>
-                  <a:srgbClr val="000000"/>
-                </a:solidFill>
-                <a:latin typeface="Cascadia Mono" panose="020B0609020000020004" pitchFamily="49" charset="0"/>
-              </a:rPr>
-              <a:t>Console.WriteLine</a:t>
+                  <a:srgbClr val="2B91AF"/>
+                </a:solidFill>
+                <a:latin typeface="Cascadia Mono" panose="020B0609020000020004" pitchFamily="49" charset="0"/>
+              </a:rPr>
+              <a:t>Console</a:t>
+            </a:r>
+            <a:r>
+              <a:rPr lang="en-US" sz="2400" dirty="0" err="1">
+                <a:solidFill>
+                  <a:srgbClr val="000000"/>
+                </a:solidFill>
+                <a:latin typeface="Cascadia Mono" panose="020B0609020000020004" pitchFamily="49" charset="0"/>
+              </a:rPr>
+              <a:t>.WriteLine</a:t>
             </a:r>
             <a:r>
               <a:rPr lang="en-US" sz="2400" dirty="0">
